--- a/topic09-menus-and-persistence/unit-1/talk-2-switch-stmt/b-switch.pptx
+++ b/topic09-menus-and-persistence/unit-1/talk-2-switch-stmt/b-switch.pptx
@@ -5,7 +5,7 @@
     <p:sldMasterId id="2147483660" r:id="rId1"/>
   </p:sldMasterIdLst>
   <p:notesMasterIdLst>
-    <p:notesMasterId r:id="rId11"/>
+    <p:notesMasterId r:id="rId12"/>
   </p:notesMasterIdLst>
   <p:sldIdLst>
     <p:sldId id="383" r:id="rId2"/>
@@ -16,7 +16,8 @@
     <p:sldId id="452" r:id="rId7"/>
     <p:sldId id="453" r:id="rId8"/>
     <p:sldId id="339" r:id="rId9"/>
-    <p:sldId id="347" r:id="rId10"/>
+    <p:sldId id="454" r:id="rId10"/>
+    <p:sldId id="347" r:id="rId11"/>
   </p:sldIdLst>
   <p:sldSz cx="12192000" cy="6858000"/>
   <p:notesSz cx="6858000" cy="9144000"/>
@@ -216,7 +217,7 @@
           <a:p>
             <a:fld id="{56BC3C30-7F3D-4B20-9974-47C57B22CA6E}" type="datetimeFigureOut">
               <a:rPr lang="en-IE" smtClean="0"/>
-              <a:t>11/11/2025</a:t>
+              <a:t>12/11/2025</a:t>
             </a:fld>
             <a:endParaRPr lang="en-IE"/>
           </a:p>
@@ -3538,7 +3539,7 @@
             <a:fld id="{1D8BD707-D9CF-40AE-B4C6-C98DA3205C09}" type="datetimeFigureOut">
               <a:rPr lang="en-US" smtClean="0"/>
               <a:pPr/>
-              <a:t>11/11/25</a:t>
+              <a:t>11/12/25</a:t>
             </a:fld>
             <a:endParaRPr lang="en-US"/>
           </a:p>
@@ -3710,7 +3711,7 @@
             <a:fld id="{1D8BD707-D9CF-40AE-B4C6-C98DA3205C09}" type="datetimeFigureOut">
               <a:rPr lang="en-US" smtClean="0"/>
               <a:pPr/>
-              <a:t>11/11/25</a:t>
+              <a:t>11/12/25</a:t>
             </a:fld>
             <a:endParaRPr lang="en-US"/>
           </a:p>
@@ -3892,7 +3893,7 @@
             <a:fld id="{1D8BD707-D9CF-40AE-B4C6-C98DA3205C09}" type="datetimeFigureOut">
               <a:rPr lang="en-US" smtClean="0"/>
               <a:pPr/>
-              <a:t>11/11/25</a:t>
+              <a:t>11/12/25</a:t>
             </a:fld>
             <a:endParaRPr lang="en-US"/>
           </a:p>
@@ -4531,7 +4532,7 @@
             <a:fld id="{1D8BD707-D9CF-40AE-B4C6-C98DA3205C09}" type="datetimeFigureOut">
               <a:rPr lang="en-US" smtClean="0"/>
               <a:pPr/>
-              <a:t>11/11/25</a:t>
+              <a:t>11/12/25</a:t>
             </a:fld>
             <a:endParaRPr lang="en-US"/>
           </a:p>
@@ -5125,7 +5126,7 @@
             <a:fld id="{1D8BD707-D9CF-40AE-B4C6-C98DA3205C09}" type="datetimeFigureOut">
               <a:rPr lang="en-US" smtClean="0"/>
               <a:pPr/>
-              <a:t>11/11/25</a:t>
+              <a:t>11/12/25</a:t>
             </a:fld>
             <a:endParaRPr lang="en-US"/>
           </a:p>
@@ -5426,7 +5427,7 @@
             <a:fld id="{1D8BD707-D9CF-40AE-B4C6-C98DA3205C09}" type="datetimeFigureOut">
               <a:rPr lang="en-US" smtClean="0"/>
               <a:pPr/>
-              <a:t>11/11/25</a:t>
+              <a:t>11/12/25</a:t>
             </a:fld>
             <a:endParaRPr lang="en-US"/>
           </a:p>
@@ -6179,7 +6180,7 @@
             <a:fld id="{1D8BD707-D9CF-40AE-B4C6-C98DA3205C09}" type="datetimeFigureOut">
               <a:rPr lang="en-US" smtClean="0"/>
               <a:pPr/>
-              <a:t>11/11/25</a:t>
+              <a:t>11/12/25</a:t>
             </a:fld>
             <a:endParaRPr lang="en-US"/>
           </a:p>
@@ -6591,7 +6592,7 @@
             <a:fld id="{1D8BD707-D9CF-40AE-B4C6-C98DA3205C09}" type="datetimeFigureOut">
               <a:rPr lang="en-US" smtClean="0"/>
               <a:pPr/>
-              <a:t>11/11/25</a:t>
+              <a:t>11/12/25</a:t>
             </a:fld>
             <a:endParaRPr lang="en-US"/>
           </a:p>
@@ -7010,7 +7011,7 @@
             <a:fld id="{1D8BD707-D9CF-40AE-B4C6-C98DA3205C09}" type="datetimeFigureOut">
               <a:rPr lang="en-US" smtClean="0"/>
               <a:pPr/>
-              <a:t>11/11/25</a:t>
+              <a:t>11/12/25</a:t>
             </a:fld>
             <a:endParaRPr lang="en-US"/>
           </a:p>
@@ -7289,7 +7290,7 @@
             <a:fld id="{1D8BD707-D9CF-40AE-B4C6-C98DA3205C09}" type="datetimeFigureOut">
               <a:rPr lang="en-US" smtClean="0"/>
               <a:pPr/>
-              <a:t>11/11/25</a:t>
+              <a:t>11/12/25</a:t>
             </a:fld>
             <a:endParaRPr lang="en-US"/>
           </a:p>
@@ -7548,7 +7549,7 @@
             <a:fld id="{1D8BD707-D9CF-40AE-B4C6-C98DA3205C09}" type="datetimeFigureOut">
               <a:rPr lang="en-US" smtClean="0"/>
               <a:pPr/>
-              <a:t>11/11/25</a:t>
+              <a:t>11/12/25</a:t>
             </a:fld>
             <a:endParaRPr lang="en-US"/>
           </a:p>
@@ -7768,7 +7769,7 @@
             <a:fld id="{1D8BD707-D9CF-40AE-B4C6-C98DA3205C09}" type="datetimeFigureOut">
               <a:rPr lang="en-US" smtClean="0"/>
               <a:pPr/>
-              <a:t>11/11/25</a:t>
+              <a:t>11/12/25</a:t>
             </a:fld>
             <a:endParaRPr lang="en-US"/>
           </a:p>
@@ -8566,6 +8567,102 @@
 </p:sld>
 </file>
 
+<file path=ppt/slides/slide10.xml><?xml version="1.0" encoding="utf-8"?>
+<p:sld xmlns:a="http://schemas.openxmlformats.org/drawingml/2006/main" xmlns:r="http://schemas.openxmlformats.org/officeDocument/2006/relationships" xmlns:p="http://schemas.openxmlformats.org/presentationml/2006/main">
+  <p:cSld>
+    <p:spTree>
+      <p:nvGrpSpPr>
+        <p:cNvPr id="1" name=""/>
+        <p:cNvGrpSpPr/>
+        <p:nvPr/>
+      </p:nvGrpSpPr>
+      <p:grpSpPr>
+        <a:xfrm>
+          <a:off x="0" y="0"/>
+          <a:ext cx="0" cy="0"/>
+          <a:chOff x="0" y="0"/>
+          <a:chExt cx="0" cy="0"/>
+        </a:xfrm>
+      </p:grpSpPr>
+      <p:sp>
+        <p:nvSpPr>
+          <p:cNvPr id="2" name="Title 1"/>
+          <p:cNvSpPr>
+            <a:spLocks noGrp="1"/>
+          </p:cNvSpPr>
+          <p:nvPr>
+            <p:ph type="title"/>
+          </p:nvPr>
+        </p:nvSpPr>
+        <p:spPr>
+          <a:xfrm>
+            <a:off x="609600" y="274639"/>
+            <a:ext cx="10972800" cy="1143000"/>
+          </a:xfrm>
+        </p:spPr>
+        <p:txBody>
+          <a:bodyPr anchor="ctr">
+            <a:normAutofit/>
+          </a:bodyPr>
+          <a:lstStyle/>
+          <a:p>
+            <a:r>
+              <a:rPr lang="en-IE" dirty="0"/>
+              <a:t>Questions?</a:t>
+            </a:r>
+          </a:p>
+        </p:txBody>
+      </p:sp>
+      <p:pic>
+        <p:nvPicPr>
+          <p:cNvPr id="3" name="Picture 2" descr="A green question mark in a circle&#10;&#10;AI-generated content may be incorrect.">
+            <a:extLst>
+              <a:ext uri="{FF2B5EF4-FFF2-40B4-BE49-F238E27FC236}">
+                <a16:creationId xmlns:a16="http://schemas.microsoft.com/office/drawing/2014/main" id="{5A9D487F-3157-9FE9-7E30-C739B06EAF9D}"/>
+              </a:ext>
+            </a:extLst>
+          </p:cNvPr>
+          <p:cNvPicPr>
+            <a:picLocks noChangeAspect="1"/>
+          </p:cNvPicPr>
+          <p:nvPr/>
+        </p:nvPicPr>
+        <p:blipFill>
+          <a:blip r:embed="rId2">
+            <a:extLst>
+              <a:ext uri="{28A0092B-C50C-407E-A947-70E740481C1C}">
+                <a14:useLocalDpi xmlns:a14="http://schemas.microsoft.com/office/drawing/2010/main" val="0"/>
+              </a:ext>
+            </a:extLst>
+          </a:blip>
+          <a:stretch>
+            <a:fillRect/>
+          </a:stretch>
+        </p:blipFill>
+        <p:spPr>
+          <a:xfrm>
+            <a:off x="3833019" y="1600201"/>
+            <a:ext cx="4525963" cy="4525963"/>
+          </a:xfrm>
+          <a:prstGeom prst="rect">
+            <a:avLst/>
+          </a:prstGeom>
+          <a:noFill/>
+        </p:spPr>
+      </p:pic>
+    </p:spTree>
+    <p:extLst>
+      <p:ext uri="{BB962C8B-B14F-4D97-AF65-F5344CB8AC3E}">
+        <p14:creationId xmlns:p14="http://schemas.microsoft.com/office/powerpoint/2010/main" val="815503280"/>
+      </p:ext>
+    </p:extLst>
+  </p:cSld>
+  <p:clrMapOvr>
+    <a:masterClrMapping/>
+  </p:clrMapOvr>
+</p:sld>
+</file>
+
 <file path=ppt/slides/slide2.xml><?xml version="1.0" encoding="utf-8"?>
 <p:sld xmlns:a="http://schemas.openxmlformats.org/drawingml/2006/main" xmlns:r="http://schemas.openxmlformats.org/officeDocument/2006/relationships" xmlns:p="http://schemas.openxmlformats.org/presentationml/2006/main">
   <p:cSld>
@@ -9081,10 +9178,10 @@
       </p:sp>
       <p:pic>
         <p:nvPicPr>
-          <p:cNvPr id="5" name="Picture 4">
+          <p:cNvPr id="3" name="Picture 2">
             <a:extLst>
               <a:ext uri="{FF2B5EF4-FFF2-40B4-BE49-F238E27FC236}">
-                <a16:creationId xmlns:a16="http://schemas.microsoft.com/office/drawing/2014/main" id="{3B66D72F-D372-4E04-B4B6-B8E0555949FA}"/>
+                <a16:creationId xmlns:a16="http://schemas.microsoft.com/office/drawing/2014/main" id="{DFF3B663-4E51-411C-A275-E4FDB2A9E6EC}"/>
               </a:ext>
             </a:extLst>
           </p:cNvPr>
@@ -9101,30 +9198,20 @@
         </p:blipFill>
         <p:spPr>
           <a:xfrm>
-            <a:off x="609600" y="1600200"/>
-            <a:ext cx="7374589" cy="4482031"/>
+            <a:off x="9225197" y="3619500"/>
+            <a:ext cx="2362200" cy="635000"/>
           </a:xfrm>
           <a:prstGeom prst="rect">
             <a:avLst/>
           </a:prstGeom>
-          <a:ln>
-            <a:noFill/>
-          </a:ln>
-          <a:effectLst>
-            <a:outerShdw blurRad="292100" dist="139700" dir="2700000" algn="tl" rotWithShape="0">
-              <a:srgbClr val="333333">
-                <a:alpha val="65000"/>
-              </a:srgbClr>
-            </a:outerShdw>
-          </a:effectLst>
         </p:spPr>
       </p:pic>
       <p:pic>
         <p:nvPicPr>
-          <p:cNvPr id="7" name="Picture 6">
+          <p:cNvPr id="4" name="Picture 3">
             <a:extLst>
               <a:ext uri="{FF2B5EF4-FFF2-40B4-BE49-F238E27FC236}">
-                <a16:creationId xmlns:a16="http://schemas.microsoft.com/office/drawing/2014/main" id="{4C91B7A6-452D-47AE-8303-165026E8ACCC}"/>
+                <a16:creationId xmlns:a16="http://schemas.microsoft.com/office/drawing/2014/main" id="{F1D21C1E-094F-9877-F18A-064435DDE757}"/>
               </a:ext>
             </a:extLst>
           </p:cNvPr>
@@ -9141,24 +9228,60 @@
         </p:blipFill>
         <p:spPr>
           <a:xfrm>
-            <a:off x="7848600" y="4947183"/>
-            <a:ext cx="4047390" cy="1636179"/>
+            <a:off x="914400" y="2209800"/>
+            <a:ext cx="7594600" cy="3454400"/>
           </a:xfrm>
           <a:prstGeom prst="rect">
             <a:avLst/>
           </a:prstGeom>
-          <a:ln>
-            <a:noFill/>
-          </a:ln>
-          <a:effectLst>
-            <a:outerShdw blurRad="292100" dist="139700" dir="2700000" algn="tl" rotWithShape="0">
-              <a:srgbClr val="333333">
-                <a:alpha val="65000"/>
-              </a:srgbClr>
-            </a:outerShdw>
-          </a:effectLst>
         </p:spPr>
       </p:pic>
+      <p:sp>
+        <p:nvSpPr>
+          <p:cNvPr id="6" name="Right Arrow 5">
+            <a:extLst>
+              <a:ext uri="{FF2B5EF4-FFF2-40B4-BE49-F238E27FC236}">
+                <a16:creationId xmlns:a16="http://schemas.microsoft.com/office/drawing/2014/main" id="{7DF9AB5F-39EB-0C27-84CA-77E4737B0EE5}"/>
+              </a:ext>
+            </a:extLst>
+          </p:cNvPr>
+          <p:cNvSpPr/>
+          <p:nvPr/>
+        </p:nvSpPr>
+        <p:spPr>
+          <a:xfrm>
+            <a:off x="8246789" y="3694684"/>
+            <a:ext cx="978408" cy="484632"/>
+          </a:xfrm>
+          <a:prstGeom prst="rightArrow">
+            <a:avLst/>
+          </a:prstGeom>
+        </p:spPr>
+        <p:style>
+          <a:lnRef idx="2">
+            <a:schemeClr val="accent1">
+              <a:shade val="15000"/>
+            </a:schemeClr>
+          </a:lnRef>
+          <a:fillRef idx="1">
+            <a:schemeClr val="accent1"/>
+          </a:fillRef>
+          <a:effectRef idx="0">
+            <a:schemeClr val="accent1"/>
+          </a:effectRef>
+          <a:fontRef idx="minor">
+            <a:schemeClr val="lt1"/>
+          </a:fontRef>
+        </p:style>
+        <p:txBody>
+          <a:bodyPr rtlCol="0" anchor="ctr"/>
+          <a:lstStyle/>
+          <a:p>
+            <a:pPr algn="ctr"/>
+            <a:endParaRPr lang="en-US"/>
+          </a:p>
+        </p:txBody>
+      </p:sp>
     </p:spTree>
     <p:extLst>
       <p:ext uri="{BB962C8B-B14F-4D97-AF65-F5344CB8AC3E}">
@@ -9169,6 +9292,203 @@
   <p:clrMapOvr>
     <a:masterClrMapping/>
   </p:clrMapOvr>
+  <p:timing>
+    <p:tnLst>
+      <p:par>
+        <p:cTn id="1" dur="indefinite" restart="never" nodeType="tmRoot">
+          <p:childTnLst>
+            <p:seq concurrent="1" nextAc="seek">
+              <p:cTn id="2" dur="indefinite" nodeType="mainSeq">
+                <p:childTnLst>
+                  <p:par>
+                    <p:cTn id="3" fill="hold">
+                      <p:stCondLst>
+                        <p:cond delay="indefinite"/>
+                      </p:stCondLst>
+                      <p:childTnLst>
+                        <p:par>
+                          <p:cTn id="4" fill="hold">
+                            <p:stCondLst>
+                              <p:cond delay="0"/>
+                            </p:stCondLst>
+                            <p:childTnLst>
+                              <p:par>
+                                <p:cTn id="5" presetID="2" presetClass="entr" presetSubtype="4" fill="hold" grpId="0" nodeType="clickEffect">
+                                  <p:stCondLst>
+                                    <p:cond delay="0"/>
+                                  </p:stCondLst>
+                                  <p:childTnLst>
+                                    <p:set>
+                                      <p:cBhvr>
+                                        <p:cTn id="6" dur="1" fill="hold">
+                                          <p:stCondLst>
+                                            <p:cond delay="0"/>
+                                          </p:stCondLst>
+                                        </p:cTn>
+                                        <p:tgtEl>
+                                          <p:spTgt spid="6"/>
+                                        </p:tgtEl>
+                                        <p:attrNameLst>
+                                          <p:attrName>style.visibility</p:attrName>
+                                        </p:attrNameLst>
+                                      </p:cBhvr>
+                                      <p:to>
+                                        <p:strVal val="visible"/>
+                                      </p:to>
+                                    </p:set>
+                                    <p:anim calcmode="lin" valueType="num">
+                                      <p:cBhvr additive="base">
+                                        <p:cTn id="7" dur="500" fill="hold"/>
+                                        <p:tgtEl>
+                                          <p:spTgt spid="6"/>
+                                        </p:tgtEl>
+                                        <p:attrNameLst>
+                                          <p:attrName>ppt_x</p:attrName>
+                                        </p:attrNameLst>
+                                      </p:cBhvr>
+                                      <p:tavLst>
+                                        <p:tav tm="0">
+                                          <p:val>
+                                            <p:strVal val="#ppt_x"/>
+                                          </p:val>
+                                        </p:tav>
+                                        <p:tav tm="100000">
+                                          <p:val>
+                                            <p:strVal val="#ppt_x"/>
+                                          </p:val>
+                                        </p:tav>
+                                      </p:tavLst>
+                                    </p:anim>
+                                    <p:anim calcmode="lin" valueType="num">
+                                      <p:cBhvr additive="base">
+                                        <p:cTn id="8" dur="500" fill="hold"/>
+                                        <p:tgtEl>
+                                          <p:spTgt spid="6"/>
+                                        </p:tgtEl>
+                                        <p:attrNameLst>
+                                          <p:attrName>ppt_y</p:attrName>
+                                        </p:attrNameLst>
+                                      </p:cBhvr>
+                                      <p:tavLst>
+                                        <p:tav tm="0">
+                                          <p:val>
+                                            <p:strVal val="1+#ppt_h/2"/>
+                                          </p:val>
+                                        </p:tav>
+                                        <p:tav tm="100000">
+                                          <p:val>
+                                            <p:strVal val="#ppt_y"/>
+                                          </p:val>
+                                        </p:tav>
+                                      </p:tavLst>
+                                    </p:anim>
+                                  </p:childTnLst>
+                                </p:cTn>
+                              </p:par>
+                              <p:par>
+                                <p:cTn id="9" presetID="2" presetClass="entr" presetSubtype="4" fill="hold" nodeType="withEffect">
+                                  <p:stCondLst>
+                                    <p:cond delay="0"/>
+                                  </p:stCondLst>
+                                  <p:childTnLst>
+                                    <p:set>
+                                      <p:cBhvr>
+                                        <p:cTn id="10" dur="1" fill="hold">
+                                          <p:stCondLst>
+                                            <p:cond delay="0"/>
+                                          </p:stCondLst>
+                                        </p:cTn>
+                                        <p:tgtEl>
+                                          <p:spTgt spid="3"/>
+                                        </p:tgtEl>
+                                        <p:attrNameLst>
+                                          <p:attrName>style.visibility</p:attrName>
+                                        </p:attrNameLst>
+                                      </p:cBhvr>
+                                      <p:to>
+                                        <p:strVal val="visible"/>
+                                      </p:to>
+                                    </p:set>
+                                    <p:anim calcmode="lin" valueType="num">
+                                      <p:cBhvr additive="base">
+                                        <p:cTn id="11" dur="500" fill="hold"/>
+                                        <p:tgtEl>
+                                          <p:spTgt spid="3"/>
+                                        </p:tgtEl>
+                                        <p:attrNameLst>
+                                          <p:attrName>ppt_x</p:attrName>
+                                        </p:attrNameLst>
+                                      </p:cBhvr>
+                                      <p:tavLst>
+                                        <p:tav tm="0">
+                                          <p:val>
+                                            <p:strVal val="#ppt_x"/>
+                                          </p:val>
+                                        </p:tav>
+                                        <p:tav tm="100000">
+                                          <p:val>
+                                            <p:strVal val="#ppt_x"/>
+                                          </p:val>
+                                        </p:tav>
+                                      </p:tavLst>
+                                    </p:anim>
+                                    <p:anim calcmode="lin" valueType="num">
+                                      <p:cBhvr additive="base">
+                                        <p:cTn id="12" dur="500" fill="hold"/>
+                                        <p:tgtEl>
+                                          <p:spTgt spid="3"/>
+                                        </p:tgtEl>
+                                        <p:attrNameLst>
+                                          <p:attrName>ppt_y</p:attrName>
+                                        </p:attrNameLst>
+                                      </p:cBhvr>
+                                      <p:tavLst>
+                                        <p:tav tm="0">
+                                          <p:val>
+                                            <p:strVal val="1+#ppt_h/2"/>
+                                          </p:val>
+                                        </p:tav>
+                                        <p:tav tm="100000">
+                                          <p:val>
+                                            <p:strVal val="#ppt_y"/>
+                                          </p:val>
+                                        </p:tav>
+                                      </p:tavLst>
+                                    </p:anim>
+                                  </p:childTnLst>
+                                </p:cTn>
+                              </p:par>
+                            </p:childTnLst>
+                          </p:cTn>
+                        </p:par>
+                      </p:childTnLst>
+                    </p:cTn>
+                  </p:par>
+                </p:childTnLst>
+              </p:cTn>
+              <p:prevCondLst>
+                <p:cond evt="onPrev" delay="0">
+                  <p:tgtEl>
+                    <p:sldTgt/>
+                  </p:tgtEl>
+                </p:cond>
+              </p:prevCondLst>
+              <p:nextCondLst>
+                <p:cond evt="onNext" delay="0">
+                  <p:tgtEl>
+                    <p:sldTgt/>
+                  </p:tgtEl>
+                </p:cond>
+              </p:nextCondLst>
+            </p:seq>
+          </p:childTnLst>
+        </p:cTn>
+      </p:par>
+    </p:tnLst>
+    <p:bldLst>
+      <p:bldP spid="6" grpId="0" animBg="1"/>
+    </p:bldLst>
+  </p:timing>
 </p:sld>
 </file>
 
@@ -9227,10 +9547,10 @@
       </p:sp>
       <p:pic>
         <p:nvPicPr>
-          <p:cNvPr id="10" name="Picture 9">
+          <p:cNvPr id="3" name="Picture 2">
             <a:extLst>
               <a:ext uri="{FF2B5EF4-FFF2-40B4-BE49-F238E27FC236}">
-                <a16:creationId xmlns:a16="http://schemas.microsoft.com/office/drawing/2014/main" id="{3F2172DD-53B4-4F78-901F-1FDF540155B1}"/>
+                <a16:creationId xmlns:a16="http://schemas.microsoft.com/office/drawing/2014/main" id="{5DCAED7B-9B68-8EC0-C944-D66141042A2C}"/>
               </a:ext>
             </a:extLst>
           </p:cNvPr>
@@ -9247,30 +9567,20 @@
         </p:blipFill>
         <p:spPr>
           <a:xfrm>
-            <a:off x="609600" y="1905000"/>
-            <a:ext cx="7561258" cy="4242333"/>
+            <a:off x="9124638" y="3314966"/>
+            <a:ext cx="2476500" cy="711200"/>
           </a:xfrm>
           <a:prstGeom prst="rect">
             <a:avLst/>
           </a:prstGeom>
-          <a:ln>
-            <a:noFill/>
-          </a:ln>
-          <a:effectLst>
-            <a:outerShdw blurRad="292100" dist="139700" dir="2700000" algn="tl" rotWithShape="0">
-              <a:srgbClr val="333333">
-                <a:alpha val="65000"/>
-              </a:srgbClr>
-            </a:outerShdw>
-          </a:effectLst>
         </p:spPr>
       </p:pic>
       <p:pic>
         <p:nvPicPr>
-          <p:cNvPr id="8" name="Picture 7">
+          <p:cNvPr id="4" name="Picture 3">
             <a:extLst>
               <a:ext uri="{FF2B5EF4-FFF2-40B4-BE49-F238E27FC236}">
-                <a16:creationId xmlns:a16="http://schemas.microsoft.com/office/drawing/2014/main" id="{CBFF17F7-1545-4904-AE65-9D63BE8F8D85}"/>
+                <a16:creationId xmlns:a16="http://schemas.microsoft.com/office/drawing/2014/main" id="{E204DBD6-F84E-2F90-5257-03440BF38E19}"/>
               </a:ext>
             </a:extLst>
           </p:cNvPr>
@@ -9287,24 +9597,60 @@
         </p:blipFill>
         <p:spPr>
           <a:xfrm>
-            <a:off x="7543800" y="3090815"/>
-            <a:ext cx="4356926" cy="1870702"/>
+            <a:off x="457200" y="2133600"/>
+            <a:ext cx="7556500" cy="3556000"/>
           </a:xfrm>
           <a:prstGeom prst="rect">
             <a:avLst/>
           </a:prstGeom>
-          <a:ln>
-            <a:noFill/>
-          </a:ln>
-          <a:effectLst>
-            <a:outerShdw blurRad="292100" dist="139700" dir="2700000" algn="tl" rotWithShape="0">
-              <a:srgbClr val="333333">
-                <a:alpha val="65000"/>
-              </a:srgbClr>
-            </a:outerShdw>
-          </a:effectLst>
         </p:spPr>
       </p:pic>
+      <p:sp>
+        <p:nvSpPr>
+          <p:cNvPr id="5" name="Right Arrow 4">
+            <a:extLst>
+              <a:ext uri="{FF2B5EF4-FFF2-40B4-BE49-F238E27FC236}">
+                <a16:creationId xmlns:a16="http://schemas.microsoft.com/office/drawing/2014/main" id="{5CBB0B61-A2F6-AE19-AB68-FE61AE3984EC}"/>
+              </a:ext>
+            </a:extLst>
+          </p:cNvPr>
+          <p:cNvSpPr/>
+          <p:nvPr/>
+        </p:nvSpPr>
+        <p:spPr>
+          <a:xfrm>
+            <a:off x="8013700" y="3408230"/>
+            <a:ext cx="978408" cy="484632"/>
+          </a:xfrm>
+          <a:prstGeom prst="rightArrow">
+            <a:avLst/>
+          </a:prstGeom>
+        </p:spPr>
+        <p:style>
+          <a:lnRef idx="2">
+            <a:schemeClr val="accent1">
+              <a:shade val="15000"/>
+            </a:schemeClr>
+          </a:lnRef>
+          <a:fillRef idx="1">
+            <a:schemeClr val="accent1"/>
+          </a:fillRef>
+          <a:effectRef idx="0">
+            <a:schemeClr val="accent1"/>
+          </a:effectRef>
+          <a:fontRef idx="minor">
+            <a:schemeClr val="lt1"/>
+          </a:fontRef>
+        </p:style>
+        <p:txBody>
+          <a:bodyPr rtlCol="0" anchor="ctr"/>
+          <a:lstStyle/>
+          <a:p>
+            <a:pPr algn="ctr"/>
+            <a:endParaRPr lang="en-US"/>
+          </a:p>
+        </p:txBody>
+      </p:sp>
     </p:spTree>
     <p:extLst>
       <p:ext uri="{BB962C8B-B14F-4D97-AF65-F5344CB8AC3E}">
@@ -9315,6 +9661,173 @@
   <p:clrMapOvr>
     <a:masterClrMapping/>
   </p:clrMapOvr>
+  <p:timing>
+    <p:tnLst>
+      <p:par>
+        <p:cTn id="1" dur="indefinite" restart="never" nodeType="tmRoot">
+          <p:childTnLst>
+            <p:seq concurrent="1" nextAc="seek">
+              <p:cTn id="2" dur="indefinite" nodeType="mainSeq">
+                <p:childTnLst>
+                  <p:par>
+                    <p:cTn id="3" fill="hold">
+                      <p:stCondLst>
+                        <p:cond delay="indefinite"/>
+                      </p:stCondLst>
+                      <p:childTnLst>
+                        <p:par>
+                          <p:cTn id="4" fill="hold">
+                            <p:stCondLst>
+                              <p:cond delay="0"/>
+                            </p:stCondLst>
+                            <p:childTnLst>
+                              <p:par>
+                                <p:cTn id="5" presetID="12" presetClass="entr" presetSubtype="4" fill="hold" grpId="0" nodeType="clickEffect">
+                                  <p:stCondLst>
+                                    <p:cond delay="0"/>
+                                  </p:stCondLst>
+                                  <p:childTnLst>
+                                    <p:set>
+                                      <p:cBhvr>
+                                        <p:cTn id="6" dur="1" fill="hold">
+                                          <p:stCondLst>
+                                            <p:cond delay="0"/>
+                                          </p:stCondLst>
+                                        </p:cTn>
+                                        <p:tgtEl>
+                                          <p:spTgt spid="5"/>
+                                        </p:tgtEl>
+                                        <p:attrNameLst>
+                                          <p:attrName>style.visibility</p:attrName>
+                                        </p:attrNameLst>
+                                      </p:cBhvr>
+                                      <p:to>
+                                        <p:strVal val="visible"/>
+                                      </p:to>
+                                    </p:set>
+                                    <p:anim calcmode="lin" valueType="num">
+                                      <p:cBhvr additive="base">
+                                        <p:cTn id="7" dur="500"/>
+                                        <p:tgtEl>
+                                          <p:spTgt spid="5"/>
+                                        </p:tgtEl>
+                                        <p:attrNameLst>
+                                          <p:attrName>ppt_y</p:attrName>
+                                        </p:attrNameLst>
+                                      </p:cBhvr>
+                                      <p:tavLst>
+                                        <p:tav tm="0">
+                                          <p:val>
+                                            <p:strVal val="#ppt_y+#ppt_h*1.125000"/>
+                                          </p:val>
+                                        </p:tav>
+                                        <p:tav tm="100000">
+                                          <p:val>
+                                            <p:strVal val="#ppt_y"/>
+                                          </p:val>
+                                        </p:tav>
+                                      </p:tavLst>
+                                    </p:anim>
+                                    <p:animEffect transition="in" filter="wipe(up)">
+                                      <p:cBhvr>
+                                        <p:cTn id="8" dur="500"/>
+                                        <p:tgtEl>
+                                          <p:spTgt spid="5"/>
+                                        </p:tgtEl>
+                                      </p:cBhvr>
+                                    </p:animEffect>
+                                  </p:childTnLst>
+                                </p:cTn>
+                              </p:par>
+                              <p:par>
+                                <p:cTn id="9" presetID="12" presetClass="entr" presetSubtype="4" fill="hold" nodeType="withEffect">
+                                  <p:stCondLst>
+                                    <p:cond delay="0"/>
+                                  </p:stCondLst>
+                                  <p:childTnLst>
+                                    <p:set>
+                                      <p:cBhvr>
+                                        <p:cTn id="10" dur="1" fill="hold">
+                                          <p:stCondLst>
+                                            <p:cond delay="0"/>
+                                          </p:stCondLst>
+                                        </p:cTn>
+                                        <p:tgtEl>
+                                          <p:spTgt spid="3"/>
+                                        </p:tgtEl>
+                                        <p:attrNameLst>
+                                          <p:attrName>style.visibility</p:attrName>
+                                        </p:attrNameLst>
+                                      </p:cBhvr>
+                                      <p:to>
+                                        <p:strVal val="visible"/>
+                                      </p:to>
+                                    </p:set>
+                                    <p:anim calcmode="lin" valueType="num">
+                                      <p:cBhvr additive="base">
+                                        <p:cTn id="11" dur="500"/>
+                                        <p:tgtEl>
+                                          <p:spTgt spid="3"/>
+                                        </p:tgtEl>
+                                        <p:attrNameLst>
+                                          <p:attrName>ppt_y</p:attrName>
+                                        </p:attrNameLst>
+                                      </p:cBhvr>
+                                      <p:tavLst>
+                                        <p:tav tm="0">
+                                          <p:val>
+                                            <p:strVal val="#ppt_y+#ppt_h*1.125000"/>
+                                          </p:val>
+                                        </p:tav>
+                                        <p:tav tm="100000">
+                                          <p:val>
+                                            <p:strVal val="#ppt_y"/>
+                                          </p:val>
+                                        </p:tav>
+                                      </p:tavLst>
+                                    </p:anim>
+                                    <p:animEffect transition="in" filter="wipe(up)">
+                                      <p:cBhvr>
+                                        <p:cTn id="12" dur="500"/>
+                                        <p:tgtEl>
+                                          <p:spTgt spid="3"/>
+                                        </p:tgtEl>
+                                      </p:cBhvr>
+                                    </p:animEffect>
+                                  </p:childTnLst>
+                                </p:cTn>
+                              </p:par>
+                            </p:childTnLst>
+                          </p:cTn>
+                        </p:par>
+                      </p:childTnLst>
+                    </p:cTn>
+                  </p:par>
+                </p:childTnLst>
+              </p:cTn>
+              <p:prevCondLst>
+                <p:cond evt="onPrev" delay="0">
+                  <p:tgtEl>
+                    <p:sldTgt/>
+                  </p:tgtEl>
+                </p:cond>
+              </p:prevCondLst>
+              <p:nextCondLst>
+                <p:cond evt="onNext" delay="0">
+                  <p:tgtEl>
+                    <p:sldTgt/>
+                  </p:tgtEl>
+                </p:cond>
+              </p:nextCondLst>
+            </p:seq>
+          </p:childTnLst>
+        </p:cTn>
+      </p:par>
+    </p:tnLst>
+    <p:bldLst>
+      <p:bldP spid="5" grpId="0" animBg="1"/>
+    </p:bldLst>
+  </p:timing>
 </p:sld>
 </file>
 
@@ -9371,86 +9884,6 @@
           </a:p>
         </p:txBody>
       </p:sp>
-      <p:pic>
-        <p:nvPicPr>
-          <p:cNvPr id="4" name="Picture 3">
-            <a:extLst>
-              <a:ext uri="{FF2B5EF4-FFF2-40B4-BE49-F238E27FC236}">
-                <a16:creationId xmlns:a16="http://schemas.microsoft.com/office/drawing/2014/main" id="{5F2EF6DC-4271-435B-ADAC-2C1DB12BD9D1}"/>
-              </a:ext>
-            </a:extLst>
-          </p:cNvPr>
-          <p:cNvPicPr>
-            <a:picLocks noChangeAspect="1"/>
-          </p:cNvPicPr>
-          <p:nvPr/>
-        </p:nvPicPr>
-        <p:blipFill>
-          <a:blip r:embed="rId3"/>
-          <a:stretch>
-            <a:fillRect/>
-          </a:stretch>
-        </p:blipFill>
-        <p:spPr>
-          <a:xfrm>
-            <a:off x="609600" y="2895600"/>
-            <a:ext cx="7339388" cy="3104627"/>
-          </a:xfrm>
-          <a:prstGeom prst="rect">
-            <a:avLst/>
-          </a:prstGeom>
-          <a:ln>
-            <a:noFill/>
-          </a:ln>
-          <a:effectLst>
-            <a:outerShdw blurRad="292100" dist="139700" dir="2700000" algn="tl" rotWithShape="0">
-              <a:srgbClr val="333333">
-                <a:alpha val="65000"/>
-              </a:srgbClr>
-            </a:outerShdw>
-          </a:effectLst>
-        </p:spPr>
-      </p:pic>
-      <p:pic>
-        <p:nvPicPr>
-          <p:cNvPr id="5" name="Picture 4">
-            <a:extLst>
-              <a:ext uri="{FF2B5EF4-FFF2-40B4-BE49-F238E27FC236}">
-                <a16:creationId xmlns:a16="http://schemas.microsoft.com/office/drawing/2014/main" id="{5598D660-6C57-40AC-BD8D-285DCEE5691C}"/>
-              </a:ext>
-            </a:extLst>
-          </p:cNvPr>
-          <p:cNvPicPr>
-            <a:picLocks noChangeAspect="1"/>
-          </p:cNvPicPr>
-          <p:nvPr/>
-        </p:nvPicPr>
-        <p:blipFill>
-          <a:blip r:embed="rId4"/>
-          <a:stretch>
-            <a:fillRect/>
-          </a:stretch>
-        </p:blipFill>
-        <p:spPr>
-          <a:xfrm>
-            <a:off x="7543800" y="3090815"/>
-            <a:ext cx="4356926" cy="1870702"/>
-          </a:xfrm>
-          <a:prstGeom prst="rect">
-            <a:avLst/>
-          </a:prstGeom>
-          <a:ln>
-            <a:noFill/>
-          </a:ln>
-          <a:effectLst>
-            <a:outerShdw blurRad="292100" dist="139700" dir="2700000" algn="tl" rotWithShape="0">
-              <a:srgbClr val="333333">
-                <a:alpha val="65000"/>
-              </a:srgbClr>
-            </a:outerShdw>
-          </a:effectLst>
-        </p:spPr>
-      </p:pic>
       <p:sp>
         <p:nvSpPr>
           <p:cNvPr id="3" name="Rectangle: Rounded Corners 2">
@@ -9501,6 +9934,112 @@
           </a:p>
         </p:txBody>
       </p:sp>
+      <p:pic>
+        <p:nvPicPr>
+          <p:cNvPr id="6" name="Picture 5">
+            <a:extLst>
+              <a:ext uri="{FF2B5EF4-FFF2-40B4-BE49-F238E27FC236}">
+                <a16:creationId xmlns:a16="http://schemas.microsoft.com/office/drawing/2014/main" id="{4BE691FC-87AC-5505-26D1-B0FC1F745049}"/>
+              </a:ext>
+            </a:extLst>
+          </p:cNvPr>
+          <p:cNvPicPr>
+            <a:picLocks noChangeAspect="1"/>
+          </p:cNvPicPr>
+          <p:nvPr/>
+        </p:nvPicPr>
+        <p:blipFill>
+          <a:blip r:embed="rId3"/>
+          <a:stretch>
+            <a:fillRect/>
+          </a:stretch>
+        </p:blipFill>
+        <p:spPr>
+          <a:xfrm>
+            <a:off x="9227279" y="3845369"/>
+            <a:ext cx="2476500" cy="711200"/>
+          </a:xfrm>
+          <a:prstGeom prst="rect">
+            <a:avLst/>
+          </a:prstGeom>
+        </p:spPr>
+      </p:pic>
+      <p:sp>
+        <p:nvSpPr>
+          <p:cNvPr id="7" name="Right Arrow 6">
+            <a:extLst>
+              <a:ext uri="{FF2B5EF4-FFF2-40B4-BE49-F238E27FC236}">
+                <a16:creationId xmlns:a16="http://schemas.microsoft.com/office/drawing/2014/main" id="{5671DB54-EAB4-CF02-01B7-CF6AA40CF031}"/>
+              </a:ext>
+            </a:extLst>
+          </p:cNvPr>
+          <p:cNvSpPr/>
+          <p:nvPr/>
+        </p:nvSpPr>
+        <p:spPr>
+          <a:xfrm>
+            <a:off x="8116341" y="3938633"/>
+            <a:ext cx="978408" cy="484632"/>
+          </a:xfrm>
+          <a:prstGeom prst="rightArrow">
+            <a:avLst/>
+          </a:prstGeom>
+        </p:spPr>
+        <p:style>
+          <a:lnRef idx="2">
+            <a:schemeClr val="accent1">
+              <a:shade val="15000"/>
+            </a:schemeClr>
+          </a:lnRef>
+          <a:fillRef idx="1">
+            <a:schemeClr val="accent1"/>
+          </a:fillRef>
+          <a:effectRef idx="0">
+            <a:schemeClr val="accent1"/>
+          </a:effectRef>
+          <a:fontRef idx="minor">
+            <a:schemeClr val="lt1"/>
+          </a:fontRef>
+        </p:style>
+        <p:txBody>
+          <a:bodyPr rtlCol="0" anchor="ctr"/>
+          <a:lstStyle/>
+          <a:p>
+            <a:pPr algn="ctr"/>
+            <a:endParaRPr lang="en-US"/>
+          </a:p>
+        </p:txBody>
+      </p:sp>
+      <p:pic>
+        <p:nvPicPr>
+          <p:cNvPr id="8" name="Picture 7">
+            <a:extLst>
+              <a:ext uri="{FF2B5EF4-FFF2-40B4-BE49-F238E27FC236}">
+                <a16:creationId xmlns:a16="http://schemas.microsoft.com/office/drawing/2014/main" id="{7F16F714-2BB0-85E2-49B9-49B5C2B9AE76}"/>
+              </a:ext>
+            </a:extLst>
+          </p:cNvPr>
+          <p:cNvPicPr>
+            <a:picLocks noChangeAspect="1"/>
+          </p:cNvPicPr>
+          <p:nvPr/>
+        </p:nvPicPr>
+        <p:blipFill>
+          <a:blip r:embed="rId4"/>
+          <a:stretch>
+            <a:fillRect/>
+          </a:stretch>
+        </p:blipFill>
+        <p:spPr>
+          <a:xfrm>
+            <a:off x="584616" y="2635226"/>
+            <a:ext cx="7569200" cy="3670300"/>
+          </a:xfrm>
+          <a:prstGeom prst="rect">
+            <a:avLst/>
+          </a:prstGeom>
+        </p:spPr>
+      </p:pic>
     </p:spTree>
     <p:extLst>
       <p:ext uri="{BB962C8B-B14F-4D97-AF65-F5344CB8AC3E}">
@@ -9511,6 +10050,173 @@
   <p:clrMapOvr>
     <a:masterClrMapping/>
   </p:clrMapOvr>
+  <p:timing>
+    <p:tnLst>
+      <p:par>
+        <p:cTn id="1" dur="indefinite" restart="never" nodeType="tmRoot">
+          <p:childTnLst>
+            <p:seq concurrent="1" nextAc="seek">
+              <p:cTn id="2" dur="indefinite" nodeType="mainSeq">
+                <p:childTnLst>
+                  <p:par>
+                    <p:cTn id="3" fill="hold">
+                      <p:stCondLst>
+                        <p:cond delay="indefinite"/>
+                      </p:stCondLst>
+                      <p:childTnLst>
+                        <p:par>
+                          <p:cTn id="4" fill="hold">
+                            <p:stCondLst>
+                              <p:cond delay="0"/>
+                            </p:stCondLst>
+                            <p:childTnLst>
+                              <p:par>
+                                <p:cTn id="5" presetID="12" presetClass="entr" presetSubtype="4" fill="hold" grpId="0" nodeType="clickEffect">
+                                  <p:stCondLst>
+                                    <p:cond delay="0"/>
+                                  </p:stCondLst>
+                                  <p:childTnLst>
+                                    <p:set>
+                                      <p:cBhvr>
+                                        <p:cTn id="6" dur="1" fill="hold">
+                                          <p:stCondLst>
+                                            <p:cond delay="0"/>
+                                          </p:stCondLst>
+                                        </p:cTn>
+                                        <p:tgtEl>
+                                          <p:spTgt spid="7"/>
+                                        </p:tgtEl>
+                                        <p:attrNameLst>
+                                          <p:attrName>style.visibility</p:attrName>
+                                        </p:attrNameLst>
+                                      </p:cBhvr>
+                                      <p:to>
+                                        <p:strVal val="visible"/>
+                                      </p:to>
+                                    </p:set>
+                                    <p:anim calcmode="lin" valueType="num">
+                                      <p:cBhvr additive="base">
+                                        <p:cTn id="7" dur="500"/>
+                                        <p:tgtEl>
+                                          <p:spTgt spid="7"/>
+                                        </p:tgtEl>
+                                        <p:attrNameLst>
+                                          <p:attrName>ppt_y</p:attrName>
+                                        </p:attrNameLst>
+                                      </p:cBhvr>
+                                      <p:tavLst>
+                                        <p:tav tm="0">
+                                          <p:val>
+                                            <p:strVal val="#ppt_y+#ppt_h*1.125000"/>
+                                          </p:val>
+                                        </p:tav>
+                                        <p:tav tm="100000">
+                                          <p:val>
+                                            <p:strVal val="#ppt_y"/>
+                                          </p:val>
+                                        </p:tav>
+                                      </p:tavLst>
+                                    </p:anim>
+                                    <p:animEffect transition="in" filter="wipe(up)">
+                                      <p:cBhvr>
+                                        <p:cTn id="8" dur="500"/>
+                                        <p:tgtEl>
+                                          <p:spTgt spid="7"/>
+                                        </p:tgtEl>
+                                      </p:cBhvr>
+                                    </p:animEffect>
+                                  </p:childTnLst>
+                                </p:cTn>
+                              </p:par>
+                              <p:par>
+                                <p:cTn id="9" presetID="12" presetClass="entr" presetSubtype="4" fill="hold" nodeType="withEffect">
+                                  <p:stCondLst>
+                                    <p:cond delay="0"/>
+                                  </p:stCondLst>
+                                  <p:childTnLst>
+                                    <p:set>
+                                      <p:cBhvr>
+                                        <p:cTn id="10" dur="1" fill="hold">
+                                          <p:stCondLst>
+                                            <p:cond delay="0"/>
+                                          </p:stCondLst>
+                                        </p:cTn>
+                                        <p:tgtEl>
+                                          <p:spTgt spid="6"/>
+                                        </p:tgtEl>
+                                        <p:attrNameLst>
+                                          <p:attrName>style.visibility</p:attrName>
+                                        </p:attrNameLst>
+                                      </p:cBhvr>
+                                      <p:to>
+                                        <p:strVal val="visible"/>
+                                      </p:to>
+                                    </p:set>
+                                    <p:anim calcmode="lin" valueType="num">
+                                      <p:cBhvr additive="base">
+                                        <p:cTn id="11" dur="500"/>
+                                        <p:tgtEl>
+                                          <p:spTgt spid="6"/>
+                                        </p:tgtEl>
+                                        <p:attrNameLst>
+                                          <p:attrName>ppt_y</p:attrName>
+                                        </p:attrNameLst>
+                                      </p:cBhvr>
+                                      <p:tavLst>
+                                        <p:tav tm="0">
+                                          <p:val>
+                                            <p:strVal val="#ppt_y+#ppt_h*1.125000"/>
+                                          </p:val>
+                                        </p:tav>
+                                        <p:tav tm="100000">
+                                          <p:val>
+                                            <p:strVal val="#ppt_y"/>
+                                          </p:val>
+                                        </p:tav>
+                                      </p:tavLst>
+                                    </p:anim>
+                                    <p:animEffect transition="in" filter="wipe(up)">
+                                      <p:cBhvr>
+                                        <p:cTn id="12" dur="500"/>
+                                        <p:tgtEl>
+                                          <p:spTgt spid="6"/>
+                                        </p:tgtEl>
+                                      </p:cBhvr>
+                                    </p:animEffect>
+                                  </p:childTnLst>
+                                </p:cTn>
+                              </p:par>
+                            </p:childTnLst>
+                          </p:cTn>
+                        </p:par>
+                      </p:childTnLst>
+                    </p:cTn>
+                  </p:par>
+                </p:childTnLst>
+              </p:cTn>
+              <p:prevCondLst>
+                <p:cond evt="onPrev" delay="0">
+                  <p:tgtEl>
+                    <p:sldTgt/>
+                  </p:tgtEl>
+                </p:cond>
+              </p:prevCondLst>
+              <p:nextCondLst>
+                <p:cond evt="onNext" delay="0">
+                  <p:tgtEl>
+                    <p:sldTgt/>
+                  </p:tgtEl>
+                </p:cond>
+              </p:nextCondLst>
+            </p:seq>
+          </p:childTnLst>
+        </p:cTn>
+      </p:par>
+    </p:tnLst>
+    <p:bldLst>
+      <p:bldP spid="7" grpId="0" animBg="1"/>
+    </p:bldLst>
+  </p:timing>
 </p:sld>
 </file>
 
@@ -9531,48 +10237,12 @@
           <a:chExt cx="0" cy="0"/>
         </a:xfrm>
       </p:grpSpPr>
-      <p:sp>
-        <p:nvSpPr>
-          <p:cNvPr id="2" name="Title 1"/>
-          <p:cNvSpPr>
-            <a:spLocks noGrp="1"/>
-          </p:cNvSpPr>
-          <p:nvPr>
-            <p:ph type="title"/>
-          </p:nvPr>
-        </p:nvSpPr>
-        <p:spPr/>
-        <p:txBody>
-          <a:bodyPr>
-            <a:normAutofit/>
-          </a:bodyPr>
-          <a:lstStyle/>
-          <a:p>
-            <a:r>
-              <a:rPr lang="en-IE" dirty="0"/>
-              <a:t>The switch statement – </a:t>
-            </a:r>
-            <a:r>
-              <a:rPr lang="en-IE" dirty="0">
-                <a:solidFill>
-                  <a:srgbClr val="FF0000"/>
-                </a:solidFill>
-              </a:rPr>
-              <a:t>char </a:t>
-            </a:r>
-            <a:r>
-              <a:rPr lang="en-IE" dirty="0"/>
-              <a:t>example</a:t>
-            </a:r>
-          </a:p>
-        </p:txBody>
-      </p:sp>
       <p:pic>
         <p:nvPicPr>
-          <p:cNvPr id="7" name="Picture 6">
+          <p:cNvPr id="4" name="Picture 3">
             <a:extLst>
               <a:ext uri="{FF2B5EF4-FFF2-40B4-BE49-F238E27FC236}">
-                <a16:creationId xmlns:a16="http://schemas.microsoft.com/office/drawing/2014/main" id="{5C915B61-508B-4A8D-B9B7-03592883F587}"/>
+                <a16:creationId xmlns:a16="http://schemas.microsoft.com/office/drawing/2014/main" id="{5C3793D8-83C8-CAB1-47E9-8470757F8B70}"/>
               </a:ext>
             </a:extLst>
           </p:cNvPr>
@@ -9589,30 +10259,56 @@
         </p:blipFill>
         <p:spPr>
           <a:xfrm>
-            <a:off x="838200" y="2286000"/>
-            <a:ext cx="9924976" cy="3886200"/>
+            <a:off x="457199" y="2203255"/>
+            <a:ext cx="9340937" cy="3283145"/>
           </a:xfrm>
           <a:prstGeom prst="rect">
             <a:avLst/>
           </a:prstGeom>
-          <a:ln>
-            <a:noFill/>
-          </a:ln>
-          <a:effectLst>
-            <a:outerShdw blurRad="292100" dist="139700" dir="2700000" algn="tl" rotWithShape="0">
-              <a:srgbClr val="333333">
-                <a:alpha val="65000"/>
-              </a:srgbClr>
-            </a:outerShdw>
-          </a:effectLst>
         </p:spPr>
       </p:pic>
+      <p:sp>
+        <p:nvSpPr>
+          <p:cNvPr id="2" name="Title 1"/>
+          <p:cNvSpPr>
+            <a:spLocks noGrp="1"/>
+          </p:cNvSpPr>
+          <p:nvPr>
+            <p:ph type="title"/>
+          </p:nvPr>
+        </p:nvSpPr>
+        <p:spPr/>
+        <p:txBody>
+          <a:bodyPr>
+            <a:normAutofit/>
+          </a:bodyPr>
+          <a:lstStyle/>
+          <a:p>
+            <a:r>
+              <a:rPr lang="en-IE" dirty="0"/>
+              <a:t>The switch statement – </a:t>
+            </a:r>
+            <a:r>
+              <a:rPr lang="en-IE" dirty="0">
+                <a:solidFill>
+                  <a:srgbClr val="FF0000"/>
+                </a:solidFill>
+              </a:rPr>
+              <a:t>char </a:t>
+            </a:r>
+            <a:r>
+              <a:rPr lang="en-IE" dirty="0"/>
+              <a:t>example</a:t>
+            </a:r>
+          </a:p>
+        </p:txBody>
+      </p:sp>
       <p:pic>
         <p:nvPicPr>
-          <p:cNvPr id="9" name="Picture 8">
+          <p:cNvPr id="3" name="Picture 2">
             <a:extLst>
               <a:ext uri="{FF2B5EF4-FFF2-40B4-BE49-F238E27FC236}">
-                <a16:creationId xmlns:a16="http://schemas.microsoft.com/office/drawing/2014/main" id="{9BC02965-4598-454F-8107-49BBDCAA437A}"/>
+                <a16:creationId xmlns:a16="http://schemas.microsoft.com/office/drawing/2014/main" id="{D69E8841-4FB1-9A8C-5679-16AFA6B029B7}"/>
               </a:ext>
             </a:extLst>
           </p:cNvPr>
@@ -9629,24 +10325,60 @@
         </p:blipFill>
         <p:spPr>
           <a:xfrm>
-            <a:off x="6966857" y="1913950"/>
-            <a:ext cx="4691743" cy="1456751"/>
+            <a:off x="9448800" y="3411511"/>
+            <a:ext cx="2438400" cy="660400"/>
           </a:xfrm>
           <a:prstGeom prst="rect">
             <a:avLst/>
           </a:prstGeom>
-          <a:ln>
-            <a:noFill/>
-          </a:ln>
-          <a:effectLst>
-            <a:outerShdw blurRad="292100" dist="139700" dir="2700000" algn="tl" rotWithShape="0">
-              <a:srgbClr val="333333">
-                <a:alpha val="65000"/>
-              </a:srgbClr>
-            </a:outerShdw>
-          </a:effectLst>
         </p:spPr>
       </p:pic>
+      <p:sp>
+        <p:nvSpPr>
+          <p:cNvPr id="5" name="Right Arrow 4">
+            <a:extLst>
+              <a:ext uri="{FF2B5EF4-FFF2-40B4-BE49-F238E27FC236}">
+                <a16:creationId xmlns:a16="http://schemas.microsoft.com/office/drawing/2014/main" id="{552489A5-68A5-EF23-6E73-7CCBB30E3B89}"/>
+              </a:ext>
+            </a:extLst>
+          </p:cNvPr>
+          <p:cNvSpPr/>
+          <p:nvPr/>
+        </p:nvSpPr>
+        <p:spPr>
+          <a:xfrm>
+            <a:off x="7499344" y="3495439"/>
+            <a:ext cx="1924472" cy="492543"/>
+          </a:xfrm>
+          <a:prstGeom prst="rightArrow">
+            <a:avLst/>
+          </a:prstGeom>
+        </p:spPr>
+        <p:style>
+          <a:lnRef idx="2">
+            <a:schemeClr val="accent1">
+              <a:shade val="15000"/>
+            </a:schemeClr>
+          </a:lnRef>
+          <a:fillRef idx="1">
+            <a:schemeClr val="accent1"/>
+          </a:fillRef>
+          <a:effectRef idx="0">
+            <a:schemeClr val="accent1"/>
+          </a:effectRef>
+          <a:fontRef idx="minor">
+            <a:schemeClr val="lt1"/>
+          </a:fontRef>
+        </p:style>
+        <p:txBody>
+          <a:bodyPr rtlCol="0" anchor="ctr"/>
+          <a:lstStyle/>
+          <a:p>
+            <a:pPr algn="ctr"/>
+            <a:endParaRPr lang="en-US"/>
+          </a:p>
+        </p:txBody>
+      </p:sp>
     </p:spTree>
     <p:extLst>
       <p:ext uri="{BB962C8B-B14F-4D97-AF65-F5344CB8AC3E}">
@@ -9657,6 +10389,173 @@
   <p:clrMapOvr>
     <a:masterClrMapping/>
   </p:clrMapOvr>
+  <p:timing>
+    <p:tnLst>
+      <p:par>
+        <p:cTn id="1" dur="indefinite" restart="never" nodeType="tmRoot">
+          <p:childTnLst>
+            <p:seq concurrent="1" nextAc="seek">
+              <p:cTn id="2" dur="indefinite" nodeType="mainSeq">
+                <p:childTnLst>
+                  <p:par>
+                    <p:cTn id="3" fill="hold">
+                      <p:stCondLst>
+                        <p:cond delay="indefinite"/>
+                      </p:stCondLst>
+                      <p:childTnLst>
+                        <p:par>
+                          <p:cTn id="4" fill="hold">
+                            <p:stCondLst>
+                              <p:cond delay="0"/>
+                            </p:stCondLst>
+                            <p:childTnLst>
+                              <p:par>
+                                <p:cTn id="5" presetID="12" presetClass="entr" presetSubtype="4" fill="hold" grpId="0" nodeType="clickEffect">
+                                  <p:stCondLst>
+                                    <p:cond delay="0"/>
+                                  </p:stCondLst>
+                                  <p:childTnLst>
+                                    <p:set>
+                                      <p:cBhvr>
+                                        <p:cTn id="6" dur="1" fill="hold">
+                                          <p:stCondLst>
+                                            <p:cond delay="0"/>
+                                          </p:stCondLst>
+                                        </p:cTn>
+                                        <p:tgtEl>
+                                          <p:spTgt spid="5"/>
+                                        </p:tgtEl>
+                                        <p:attrNameLst>
+                                          <p:attrName>style.visibility</p:attrName>
+                                        </p:attrNameLst>
+                                      </p:cBhvr>
+                                      <p:to>
+                                        <p:strVal val="visible"/>
+                                      </p:to>
+                                    </p:set>
+                                    <p:anim calcmode="lin" valueType="num">
+                                      <p:cBhvr additive="base">
+                                        <p:cTn id="7" dur="500"/>
+                                        <p:tgtEl>
+                                          <p:spTgt spid="5"/>
+                                        </p:tgtEl>
+                                        <p:attrNameLst>
+                                          <p:attrName>ppt_y</p:attrName>
+                                        </p:attrNameLst>
+                                      </p:cBhvr>
+                                      <p:tavLst>
+                                        <p:tav tm="0">
+                                          <p:val>
+                                            <p:strVal val="#ppt_y+#ppt_h*1.125000"/>
+                                          </p:val>
+                                        </p:tav>
+                                        <p:tav tm="100000">
+                                          <p:val>
+                                            <p:strVal val="#ppt_y"/>
+                                          </p:val>
+                                        </p:tav>
+                                      </p:tavLst>
+                                    </p:anim>
+                                    <p:animEffect transition="in" filter="wipe(up)">
+                                      <p:cBhvr>
+                                        <p:cTn id="8" dur="500"/>
+                                        <p:tgtEl>
+                                          <p:spTgt spid="5"/>
+                                        </p:tgtEl>
+                                      </p:cBhvr>
+                                    </p:animEffect>
+                                  </p:childTnLst>
+                                </p:cTn>
+                              </p:par>
+                              <p:par>
+                                <p:cTn id="9" presetID="12" presetClass="entr" presetSubtype="4" fill="hold" nodeType="withEffect">
+                                  <p:stCondLst>
+                                    <p:cond delay="0"/>
+                                  </p:stCondLst>
+                                  <p:childTnLst>
+                                    <p:set>
+                                      <p:cBhvr>
+                                        <p:cTn id="10" dur="1" fill="hold">
+                                          <p:stCondLst>
+                                            <p:cond delay="0"/>
+                                          </p:stCondLst>
+                                        </p:cTn>
+                                        <p:tgtEl>
+                                          <p:spTgt spid="3"/>
+                                        </p:tgtEl>
+                                        <p:attrNameLst>
+                                          <p:attrName>style.visibility</p:attrName>
+                                        </p:attrNameLst>
+                                      </p:cBhvr>
+                                      <p:to>
+                                        <p:strVal val="visible"/>
+                                      </p:to>
+                                    </p:set>
+                                    <p:anim calcmode="lin" valueType="num">
+                                      <p:cBhvr additive="base">
+                                        <p:cTn id="11" dur="500"/>
+                                        <p:tgtEl>
+                                          <p:spTgt spid="3"/>
+                                        </p:tgtEl>
+                                        <p:attrNameLst>
+                                          <p:attrName>ppt_y</p:attrName>
+                                        </p:attrNameLst>
+                                      </p:cBhvr>
+                                      <p:tavLst>
+                                        <p:tav tm="0">
+                                          <p:val>
+                                            <p:strVal val="#ppt_y+#ppt_h*1.125000"/>
+                                          </p:val>
+                                        </p:tav>
+                                        <p:tav tm="100000">
+                                          <p:val>
+                                            <p:strVal val="#ppt_y"/>
+                                          </p:val>
+                                        </p:tav>
+                                      </p:tavLst>
+                                    </p:anim>
+                                    <p:animEffect transition="in" filter="wipe(up)">
+                                      <p:cBhvr>
+                                        <p:cTn id="12" dur="500"/>
+                                        <p:tgtEl>
+                                          <p:spTgt spid="3"/>
+                                        </p:tgtEl>
+                                      </p:cBhvr>
+                                    </p:animEffect>
+                                  </p:childTnLst>
+                                </p:cTn>
+                              </p:par>
+                            </p:childTnLst>
+                          </p:cTn>
+                        </p:par>
+                      </p:childTnLst>
+                    </p:cTn>
+                  </p:par>
+                </p:childTnLst>
+              </p:cTn>
+              <p:prevCondLst>
+                <p:cond evt="onPrev" delay="0">
+                  <p:tgtEl>
+                    <p:sldTgt/>
+                  </p:tgtEl>
+                </p:cond>
+              </p:prevCondLst>
+              <p:nextCondLst>
+                <p:cond evt="onNext" delay="0">
+                  <p:tgtEl>
+                    <p:sldTgt/>
+                  </p:tgtEl>
+                </p:cond>
+              </p:nextCondLst>
+            </p:seq>
+          </p:childTnLst>
+        </p:cTn>
+      </p:par>
+    </p:tnLst>
+    <p:bldLst>
+      <p:bldP spid="5" grpId="0" animBg="1"/>
+    </p:bldLst>
+  </p:timing>
 </p:sld>
 </file>
 
@@ -9679,7 +10578,13 @@
       </p:grpSpPr>
       <p:sp>
         <p:nvSpPr>
-          <p:cNvPr id="2" name="Title 1"/>
+          <p:cNvPr id="2" name="Title 1">
+            <a:extLst>
+              <a:ext uri="{FF2B5EF4-FFF2-40B4-BE49-F238E27FC236}">
+                <a16:creationId xmlns:a16="http://schemas.microsoft.com/office/drawing/2014/main" id="{B9BB52CB-D6B0-9BC9-6B23-0657A47CF926}"/>
+              </a:ext>
+            </a:extLst>
+          </p:cNvPr>
           <p:cNvSpPr>
             <a:spLocks noGrp="1"/>
           </p:cNvSpPr>
@@ -9687,66 +10592,78 @@
             <p:ph type="title"/>
           </p:nvPr>
         </p:nvSpPr>
-        <p:spPr>
-          <a:xfrm>
-            <a:off x="609600" y="274639"/>
-            <a:ext cx="10972800" cy="1143000"/>
-          </a:xfrm>
-        </p:spPr>
+        <p:spPr/>
         <p:txBody>
-          <a:bodyPr anchor="ctr">
-            <a:normAutofit/>
-          </a:bodyPr>
+          <a:bodyPr/>
           <a:lstStyle/>
           <a:p>
             <a:r>
-              <a:rPr lang="en-IE" dirty="0"/>
-              <a:t>Questions?</a:t>
+              <a:rPr lang="en-US" dirty="0"/>
+              <a:t>When is switch used?</a:t>
             </a:r>
           </a:p>
         </p:txBody>
       </p:sp>
-      <p:pic>
-        <p:nvPicPr>
-          <p:cNvPr id="3" name="Picture 2" descr="A green question mark in a circle&#10;&#10;AI-generated content may be incorrect.">
+      <p:sp>
+        <p:nvSpPr>
+          <p:cNvPr id="3" name="Content Placeholder 2">
             <a:extLst>
               <a:ext uri="{FF2B5EF4-FFF2-40B4-BE49-F238E27FC236}">
-                <a16:creationId xmlns:a16="http://schemas.microsoft.com/office/drawing/2014/main" id="{5A9D487F-3157-9FE9-7E30-C739B06EAF9D}"/>
+                <a16:creationId xmlns:a16="http://schemas.microsoft.com/office/drawing/2014/main" id="{0B739D36-0F30-5F1B-596F-BB6F85232F0B}"/>
               </a:ext>
             </a:extLst>
           </p:cNvPr>
-          <p:cNvPicPr>
-            <a:picLocks noChangeAspect="1"/>
-          </p:cNvPicPr>
-          <p:nvPr/>
-        </p:nvPicPr>
-        <p:blipFill>
-          <a:blip r:embed="rId2">
-            <a:extLst>
-              <a:ext uri="{28A0092B-C50C-407E-A947-70E740481C1C}">
-                <a14:useLocalDpi xmlns:a14="http://schemas.microsoft.com/office/drawing/2010/main" val="0"/>
-              </a:ext>
-            </a:extLst>
-          </a:blip>
-          <a:stretch>
-            <a:fillRect/>
-          </a:stretch>
-        </p:blipFill>
-        <p:spPr>
-          <a:xfrm>
-            <a:off x="3833019" y="1600201"/>
-            <a:ext cx="4525963" cy="4525963"/>
-          </a:xfrm>
-          <a:prstGeom prst="rect">
-            <a:avLst/>
-          </a:prstGeom>
-          <a:noFill/>
-        </p:spPr>
-      </p:pic>
+          <p:cNvSpPr>
+            <a:spLocks noGrp="1"/>
+          </p:cNvSpPr>
+          <p:nvPr>
+            <p:ph idx="1"/>
+          </p:nvPr>
+        </p:nvSpPr>
+        <p:spPr/>
+        <p:txBody>
+          <a:bodyPr/>
+          <a:lstStyle/>
+          <a:p>
+            <a:r>
+              <a:rPr lang="en-US" dirty="0"/>
+              <a:t>When there is a short number of options with exact values ;</a:t>
+            </a:r>
+          </a:p>
+          <a:p>
+            <a:pPr marL="0" indent="0">
+              <a:buNone/>
+            </a:pPr>
+            <a:endParaRPr lang="en-US" dirty="0"/>
+          </a:p>
+          <a:p>
+            <a:r>
+              <a:rPr lang="en-US" dirty="0"/>
+              <a:t>Menus are a good example </a:t>
+            </a:r>
+            <a:r>
+              <a:rPr lang="en-US"/>
+              <a:t>of this;</a:t>
+            </a:r>
+          </a:p>
+          <a:p>
+            <a:pPr marL="0" indent="0">
+              <a:buNone/>
+            </a:pPr>
+            <a:endParaRPr lang="en-US" dirty="0"/>
+          </a:p>
+          <a:p>
+            <a:r>
+              <a:rPr lang="en-US" dirty="0"/>
+              <a:t>We will use switch statements to, given the user choice, will invoke a particular method.</a:t>
+            </a:r>
+          </a:p>
+        </p:txBody>
+      </p:sp>
     </p:spTree>
     <p:extLst>
       <p:ext uri="{BB962C8B-B14F-4D97-AF65-F5344CB8AC3E}">
-        <p14:creationId xmlns:p14="http://schemas.microsoft.com/office/powerpoint/2010/main" val="815503280"/>
+        <p14:creationId xmlns:p14="http://schemas.microsoft.com/office/powerpoint/2010/main" val="4107411339"/>
       </p:ext>
     </p:extLst>
   </p:cSld>
